--- a/10-Knowledge-Products/KP2-GIF/videos/module_1/en/decks/KP2_M1_1.5_Deck_v0.1.pptx
+++ b/10-Knowledge-Products/KP2-GIF/videos/module_1/en/decks/KP2_M1_1.5_Deck_v0.1.pptx
@@ -1003,7 +1003,7 @@
           <a:lstStyle/>
           <a:p>
             <a:r>
-              <a:t>VO: If your country has done the Enterprise Architecture work — Knowledge Product 1 — you already have a first-cut integration map: a picture of which government systems ought to exchange what. That map is the input to this step. If you do not have one yet, build it first — inventory your government's systems, who owns them and the data they hold, and sketch which ought to exchange what. That inventory is the Discover-and-Assess work KP1 covers, and it is the precondition for everything in this knowledge product; without a picture of your current systems, you cannot rank the exchanges worth building. On its own, a map of everything-connects-to-everything is overwhelming and undeployable. The Use-Case Catalogue turns it into a ranked list of specific exchanges, so the framework starts with the few that matter most instead of trying to boil the ocean.</a:t>
+              <a:t>VO: If your country has already planned its Enterprise Architecture — the whole-of-government picture of which systems exist and how they should fit together — you already have a first-cut integration map: a picture of which government systems ought to exchange what. That map is the input to this step. If you do not have one yet, build it first — inventory your government's systems, who owns them and the data they hold, and sketch which ought to exchange what. That inventory is the first step of any Enterprise Architecture — discovering what exists and assessing it — and the companion knowledge product on Government Enterprise Architecture walks you through it. It is the precondition for everything in this knowledge product; without a picture of your current systems, you cannot rank the exchanges worth building. On its own, a map of everything-connects-to-everything is overwhelming and undeployable. The Use-Case Catalogue turns it into a ranked list of specific exchanges, so the framework starts with the few that matter most instead of trying to boil the ocean.</a:t>
             </a:r>
           </a:p>
         </p:txBody>
@@ -11896,7 +11896,23 @@
                 </a:solidFill>
                 <a:latin typeface="Arial"/>
               </a:rPr>
-              <a:t>Your integration map from KP1 is the input. No map yet? Inventory your systems first.</a:t>
+              <a:t>Start from your integration map: which government systems ought to exchange what.</a:t>
+            </a:r>
+          </a:p>
+          <a:p>
+            <a:pPr>
+              <a:spcAft>
+                <a:spcPts val="800"/>
+              </a:spcAft>
+            </a:pPr>
+            <a:r>
+              <a:rPr sz="1700" b="0" i="0">
+                <a:solidFill>
+                  <a:srgbClr val="595959"/>
+                </a:solidFill>
+                <a:latin typeface="Arial"/>
+              </a:rPr>
+              <a:t>No map yet? Inventory your systems, who owns them and the data they hold — first.</a:t>
             </a:r>
           </a:p>
           <a:p>
